--- a/course/lectures/act-2-delegation-and-control/02-modeling/2-2-Modeling-2-Systems-of-Models.pptx
+++ b/course/lectures/act-2-delegation-and-control/02-modeling/2-2-Modeling-2-Systems-of-Models.pptx
@@ -15632,7 +15632,7 @@
       </p:sp>
       <p:sp>
         <p:nvSpPr>
-          <p:cNvPr id="119" name="QRPlaceholder"/>
+          <p:cNvPr id="119" name="QRPlaceholder" descr="Dashed outline marking the slot where the activity's QR code will go."/>
           <p:cNvSpPr/>
           <p:nvPr/>
         </p:nvSpPr>
@@ -15655,42 +15655,82 @@
           </a:ln>
         </p:spPr>
         <p:txBody>
-          <a:bodyPr wrap="square" lIns="91440" tIns="91440" rIns="91440" bIns="91440" anchor="ctr"/>
-          <a:lstStyle/>
-          <a:p>
-            <a:pPr algn="ctr">
-              <a:spcAft>
-                <a:spcPts val="0"/>
-              </a:spcAft>
-              <a:buNone/>
-            </a:pPr>
-            <a:r>
-              <a:rPr lang="en-US" sz="1800" b="1" dirty="0">
-                <a:solidFill>
-                  <a:srgbClr val="8E6F3E"/>
-                </a:solidFill>
-              </a:rPr>
-              <a:t>QR PLACEHOLDER</a:t>
-            </a:r>
-          </a:p>
-          <a:p>
-            <a:pPr algn="ctr">
-              <a:spcAft>
-                <a:spcPts val="0"/>
-              </a:spcAft>
-              <a:buNone/>
-            </a:pPr>
-            <a:r>
-              <a:rPr lang="en-US" sz="1800" b="0" i="1" dirty="0">
+          <a:bodyPr wrap="square" lIns="91440" tIns="91440" rIns="91440" bIns="91440" anchor="b"/>
+          <a:lstStyle/>
+          <a:p>
+            <a:pPr algn="ctr">
+              <a:buNone/>
+            </a:pPr>
+            <a:r>
+              <a:rPr lang="en-US" sz="1800" b="0" i="0" dirty="0">
                 <a:solidFill>
                   <a:srgbClr val="555960"/>
                 </a:solidFill>
               </a:rPr>
-              <a:t>form URL pending</a:t>
-            </a:r>
-          </a:p>
-        </p:txBody>
-      </p:sp>
+              <a:t>Activity QR</a:t>
+            </a:r>
+          </a:p>
+        </p:txBody>
+      </p:sp>
+      <p:grpSp>
+        <p:nvGrpSpPr>
+          <p:cNvPr id="122" name="QRVoidMark" descr="A large red X across the slot: the activity QR code has not been added yet."/>
+          <p:cNvGrpSpPr/>
+          <p:nvPr/>
+        </p:nvGrpSpPr>
+        <p:grpSpPr>
+          <a:xfrm>
+            <a:off x="6763542" y="2049620"/>
+            <a:ext cx="1947612" cy="1947612"/>
+            <a:chOff x="6763542" y="2049620"/>
+            <a:chExt cx="1947612" cy="1947612"/>
+          </a:xfrm>
+        </p:grpSpPr>
+        <p:cxnSp>
+          <p:nvCxnSpPr>
+            <p:cNvPr id="123" name="QRVoidStrokeTLBR"/>
+            <p:cNvCxnSpPr/>
+            <p:nvPr/>
+          </p:nvCxnSpPr>
+          <p:spPr>
+            <a:xfrm>
+              <a:off x="6763542" y="2049620"/>
+              <a:ext cx="1947612" cy="1947612"/>
+            </a:xfrm>
+            <a:prstGeom prst="straightConnector1">
+              <a:avLst/>
+            </a:prstGeom>
+            <a:ln w="101600" cap="rnd">
+              <a:solidFill>
+                <a:srgbClr val="C00000"/>
+              </a:solidFill>
+              <a:round/>
+            </a:ln>
+          </p:spPr>
+        </p:cxnSp>
+        <p:cxnSp>
+          <p:nvCxnSpPr>
+            <p:cNvPr id="124" name="QRVoidStrokeTRBL"/>
+            <p:cNvCxnSpPr/>
+            <p:nvPr/>
+          </p:nvCxnSpPr>
+          <p:spPr>
+            <a:xfrm flipH="1">
+              <a:off x="6763542" y="2049620"/>
+              <a:ext cx="1947612" cy="1947612"/>
+            </a:xfrm>
+            <a:prstGeom prst="straightConnector1">
+              <a:avLst/>
+            </a:prstGeom>
+            <a:ln w="101600" cap="rnd">
+              <a:solidFill>
+                <a:srgbClr val="C00000"/>
+              </a:solidFill>
+              <a:round/>
+            </a:ln>
+          </p:spPr>
+        </p:cxnSp>
+      </p:grpSp>
       <p:sp>
         <p:nvSpPr>
           <p:cNvPr id="120" name="TextBox 11"/>
@@ -21558,7 +21598,7 @@
       </p:sp>
       <p:sp>
         <p:nvSpPr>
-          <p:cNvPr id="5" name="QRPlaceholder"/>
+          <p:cNvPr id="5" name="QRPlaceholder" descr="Dashed outline marking the slot where the feedback form's QR code will go."/>
           <p:cNvSpPr/>
           <p:nvPr/>
         </p:nvSpPr>
@@ -21581,36 +21621,82 @@
           </a:ln>
         </p:spPr>
         <p:txBody>
-          <a:bodyPr wrap="square" lIns="91440" tIns="91440" rIns="91440" bIns="91440" anchor="ctr"/>
-          <a:lstStyle/>
-          <a:p>
-            <a:pPr algn="ctr">
-              <a:buNone/>
-            </a:pPr>
-            <a:r>
-              <a:rPr lang="en-US" sz="1800" b="1" i="0" dirty="0">
-                <a:solidFill>
-                  <a:srgbClr val="8E6F3E"/>
-                </a:solidFill>
-              </a:rPr>
-              <a:t>QR PLACEHOLDER</a:t>
-            </a:r>
-          </a:p>
-          <a:p>
-            <a:pPr algn="ctr">
-              <a:buNone/>
-            </a:pPr>
-            <a:r>
-              <a:rPr lang="en-US" sz="1800" b="0" i="1" dirty="0">
+          <a:bodyPr wrap="square" lIns="91440" tIns="91440" rIns="91440" bIns="91440" anchor="b"/>
+          <a:lstStyle/>
+          <a:p>
+            <a:pPr algn="ctr">
+              <a:buNone/>
+            </a:pPr>
+            <a:r>
+              <a:rPr lang="en-US" sz="1800" b="0" i="0" dirty="0">
                 <a:solidFill>
                   <a:srgbClr val="555960"/>
                 </a:solidFill>
               </a:rPr>
-              <a:t>feedback form pending</a:t>
-            </a:r>
-          </a:p>
-        </p:txBody>
-      </p:sp>
+              <a:t>Feedback QR</a:t>
+            </a:r>
+          </a:p>
+        </p:txBody>
+      </p:sp>
+      <p:grpSp>
+        <p:nvGrpSpPr>
+          <p:cNvPr id="6" name="QRVoidMark" descr="A large red X across the slot: the feedback form QR code has not been added yet."/>
+          <p:cNvGrpSpPr/>
+          <p:nvPr/>
+        </p:nvGrpSpPr>
+        <p:grpSpPr>
+          <a:xfrm>
+            <a:off x="3455706" y="3138686"/>
+            <a:ext cx="2232588" cy="2232588"/>
+            <a:chOff x="3455706" y="3138686"/>
+            <a:chExt cx="2232588" cy="2232588"/>
+          </a:xfrm>
+        </p:grpSpPr>
+        <p:cxnSp>
+          <p:nvCxnSpPr>
+            <p:cNvPr id="7" name="QRVoidStrokeTLBR"/>
+            <p:cNvCxnSpPr/>
+            <p:nvPr/>
+          </p:nvCxnSpPr>
+          <p:spPr>
+            <a:xfrm>
+              <a:off x="3455706" y="3138686"/>
+              <a:ext cx="2232588" cy="2232588"/>
+            </a:xfrm>
+            <a:prstGeom prst="straightConnector1">
+              <a:avLst/>
+            </a:prstGeom>
+            <a:ln w="101600" cap="rnd">
+              <a:solidFill>
+                <a:srgbClr val="C00000"/>
+              </a:solidFill>
+              <a:round/>
+            </a:ln>
+          </p:spPr>
+        </p:cxnSp>
+        <p:cxnSp>
+          <p:nvCxnSpPr>
+            <p:cNvPr id="8" name="QRVoidStrokeTRBL"/>
+            <p:cNvCxnSpPr/>
+            <p:nvPr/>
+          </p:nvCxnSpPr>
+          <p:spPr>
+            <a:xfrm flipH="1">
+              <a:off x="3455706" y="3138686"/>
+              <a:ext cx="2232588" cy="2232588"/>
+            </a:xfrm>
+            <a:prstGeom prst="straightConnector1">
+              <a:avLst/>
+            </a:prstGeom>
+            <a:ln w="101600" cap="rnd">
+              <a:solidFill>
+                <a:srgbClr val="C00000"/>
+              </a:solidFill>
+              <a:round/>
+            </a:ln>
+          </p:spPr>
+        </p:cxnSp>
+      </p:grpSp>
     </p:spTree>
   </p:cSld>
   <p:clrMapOvr>
